--- a/docs_and_presentations/SIH2026_PRAKALP_DRISHTI_IDEA.pptx
+++ b/docs_and_presentations/SIH2026_PRAKALP_DRISHTI_IDEA.pptx
@@ -6574,7 +6574,7 @@
                 </a:solidFill>
                 <a:latin typeface="Segoe UI"/>
               </a:rPr>
-              <a:t>When a deadline slips it is formally revised — and the project resets to "on schedule". Recomputed against the original Cabinet-approved date on the 2,207-project MoSPI corpus.</a:t>
+              <a:t>Of 2,043 ongoing projects, 1,245 are late against their original Cabinet-approved date but only 620 against the revised one. 616 are late on both yardsticks; 629 are visible only against the original.</a:t>
             </a:r>
           </a:p>
         </p:txBody>
